--- a/009_BIG_DATA_9/ml_escalable_infografia.pptx
+++ b/009_BIG_DATA_9/ml_escalable_infografia.pptx
@@ -1701,35 +1701,46 @@
         </p:nvSpPr>
         <p:spPr>
           <a:xfrm>
-            <a:off x="533400" y="1695450"/>
-            <a:ext cx="8077200" cy="1889671"/>
+            <a:off x="3224213" y="4198144"/>
+            <a:ext cx="2695575" cy="390525"/>
           </a:xfrm>
           <a:prstGeom prst="roundRect">
             <a:avLst>
-              <a:gd name="adj" fmla="val 87101"/>
+              <a:gd name="adj" fmla="val 23391220"/>
             </a:avLst>
           </a:prstGeom>
           <a:solidFill>
-            <a:srgbClr val="FFFFFF">
-              <a:alpha val="5000"/>
+            <a:srgbClr val="38BDF8">
+              <a:alpha val="12000"/>
             </a:srgbClr>
           </a:solidFill>
           <a:ln w="9525">
             <a:solidFill>
-              <a:srgbClr val="FFFFFF"/>
+              <a:srgbClr val="38BDF8"/>
             </a:solidFill>
           </a:ln>
         </p:spPr>
         <p:txBody>
-          <a:bodyPr wrap="none" lIns="0" tIns="0" rIns="0" bIns="0" rtlCol="0" anchor="ctr">
+          <a:bodyPr wrap="square" lIns="133350" tIns="133350" rIns="133350" bIns="133350" rtlCol="0" anchor="t">
             <a:normAutofit/>
           </a:bodyPr>
           <a:lstStyle/>
           <a:p>
-            <a:pPr indent="0" marL="0">
+            <a:pPr algn="ctr" indent="0" marL="0">
               <a:buNone/>
             </a:pPr>
-            <a:endParaRPr lang="en-US" dirty="0"/>
+            <a:r>
+              <a:rPr lang="en-US" sz="1125" b="1" dirty="0">
+                <a:solidFill>
+                  <a:srgbClr val="DFF7FF"/>
+                </a:solidFill>
+                <a:latin typeface="Inter" pitchFamily="34" charset="0"/>
+                <a:ea typeface="Inter" pitchFamily="34" charset="-122"/>
+                <a:cs typeface="Inter" pitchFamily="34" charset="-120"/>
+              </a:rPr>
+              <a:t>Estudio profesional · versión visual</a:t>
+            </a:r>
+            <a:endParaRPr lang="en-US" sz="1125" dirty="0"/>
           </a:p>
         </p:txBody>
       </p:sp>
@@ -1741,8 +1752,8 @@
         </p:nvSpPr>
         <p:spPr>
           <a:xfrm>
-            <a:off x="533400" y="533400"/>
-            <a:ext cx="8077200" cy="971550"/>
+            <a:off x="4271732" y="364480"/>
+            <a:ext cx="600388" cy="838200"/>
           </a:xfrm>
           <a:prstGeom prst="rect">
             <a:avLst/>
@@ -1754,24 +1765,24 @@
           <a:bodyPr wrap="square" lIns="0" tIns="0" rIns="0" bIns="0" rtlCol="0" anchor="t"/>
           <a:lstStyle/>
           <a:p>
-            <a:pPr indent="0" marL="0">
+            <a:pPr algn="ctr" indent="0" marL="0">
               <a:lnSpc>
-                <a:spcPts val="2970"/>
+                <a:spcPts val="6600"/>
               </a:lnSpc>
               <a:buNone/>
             </a:pPr>
             <a:r>
-              <a:rPr lang="en-US" sz="3300" b="1" dirty="0">
+              <a:rPr lang="en-US" sz="6600" dirty="0">
                 <a:solidFill>
-                  <a:srgbClr val="E5E7EB"/>
+                  <a:srgbClr val="EAF2FF"/>
                 </a:solidFill>
-                <a:latin typeface="Arial" pitchFamily="34" charset="0"/>
-                <a:ea typeface="Arial" pitchFamily="34" charset="-122"/>
-                <a:cs typeface="Arial" pitchFamily="34" charset="-120"/>
+                <a:latin typeface="Inter" pitchFamily="34" charset="0"/>
+                <a:ea typeface="Inter" pitchFamily="34" charset="-122"/>
+                <a:cs typeface="Inter" pitchFamily="34" charset="-120"/>
               </a:rPr>
-              <a:t>Introducción a Machine Learning Escalable</a:t>
+              <a:t>⚡</a:t>
             </a:r>
-            <a:endParaRPr lang="en-US" sz="3300" dirty="0"/>
+            <a:endParaRPr lang="en-US" sz="6600" dirty="0"/>
           </a:p>
         </p:txBody>
       </p:sp>
@@ -1783,8 +1794,8 @@
         </p:nvSpPr>
         <p:spPr>
           <a:xfrm>
-            <a:off x="752475" y="2143125"/>
-            <a:ext cx="7639050" cy="994321"/>
+            <a:off x="3065490" y="1202680"/>
+            <a:ext cx="3013019" cy="161925"/>
           </a:xfrm>
           <a:prstGeom prst="rect">
             <a:avLst/>
@@ -1796,67 +1807,184 @@
           <a:bodyPr wrap="square" lIns="0" tIns="0" rIns="0" bIns="0" rtlCol="0" anchor="t"/>
           <a:lstStyle/>
           <a:p>
-            <a:pPr marL="342900" indent="-342900">
+            <a:pPr algn="ctr" indent="0" marL="0">
               <a:lnSpc>
-                <a:spcPts val="2610"/>
+                <a:spcPts val="945"/>
               </a:lnSpc>
-              <a:buSzPct val="100000"/>
-              <a:buChar char="•"/>
+              <a:buNone/>
             </a:pPr>
             <a:r>
-              <a:rPr lang="en-US" sz="1800" dirty="0">
+              <a:rPr lang="en-US" sz="1050" b="1" dirty="0">
                 <a:solidFill>
-                  <a:srgbClr val="E5E7EB"/>
+                  <a:srgbClr val="22D3EE"/>
                 </a:solidFill>
-                <a:latin typeface="Arial" pitchFamily="34" charset="0"/>
-                <a:ea typeface="Arial" pitchFamily="34" charset="-122"/>
-                <a:cs typeface="Arial" pitchFamily="34" charset="-120"/>
+                <a:latin typeface="Inter" pitchFamily="34" charset="0"/>
+                <a:ea typeface="Inter" pitchFamily="34" charset="-122"/>
+                <a:cs typeface="Inter" pitchFamily="34" charset="-120"/>
               </a:rPr>
-              <a:t>Spark MLlib para Big Data</a:t>
+              <a:t>Apache Spark · MLlib · Big Data</a:t>
             </a:r>
-            <a:endParaRPr lang="en-US" sz="1800" dirty="0"/>
-          </a:p>
-          <a:p>
-            <a:pPr marL="342900" indent="-342900">
+            <a:endParaRPr lang="en-US" sz="1050" dirty="0"/>
+          </a:p>
+        </p:txBody>
+      </p:sp>
+      <p:sp>
+        <p:nvSpPr>
+          <p:cNvPr id="6" name="Text 3"/>
+          <p:cNvSpPr/>
+          <p:nvPr/>
+        </p:nvSpPr>
+        <p:spPr>
+          <a:xfrm>
+            <a:off x="609600" y="1478905"/>
+            <a:ext cx="7924800" cy="1255514"/>
+          </a:xfrm>
+          <a:prstGeom prst="rect">
+            <a:avLst/>
+          </a:prstGeom>
+          <a:noFill/>
+          <a:ln/>
+        </p:spPr>
+        <p:txBody>
+          <a:bodyPr wrap="square" lIns="0" tIns="0" rIns="0" bIns="0" rtlCol="0" anchor="t"/>
+          <a:lstStyle/>
+          <a:p>
+            <a:pPr algn="ctr" indent="0" marL="0">
               <a:lnSpc>
-                <a:spcPts val="2610"/>
+                <a:spcPts val="4944"/>
               </a:lnSpc>
-              <a:buSzPct val="100000"/>
-              <a:buChar char="•"/>
+              <a:buNone/>
             </a:pPr>
             <a:r>
-              <a:rPr lang="en-US" sz="1800" dirty="0">
+              <a:rPr lang="en-US" sz="4800" b="1" dirty="0">
                 <a:solidFill>
-                  <a:srgbClr val="E5E7EB"/>
+                  <a:srgbClr val="EAF2FF"/>
                 </a:solidFill>
-                <a:latin typeface="Arial" pitchFamily="34" charset="0"/>
-                <a:ea typeface="Arial" pitchFamily="34" charset="-122"/>
-                <a:cs typeface="Arial" pitchFamily="34" charset="-120"/>
+                <a:latin typeface="Space Grotesk" pitchFamily="34" charset="0"/>
+                <a:ea typeface="Space Grotesk" pitchFamily="34" charset="-122"/>
+                <a:cs typeface="Space Grotesk" pitchFamily="34" charset="-120"/>
               </a:rPr>
-              <a:t>Procesamiento distribuido y escalable</a:t>
+              <a:t>Machine Learning Escalable</a:t>
             </a:r>
-            <a:endParaRPr lang="en-US" sz="1800" dirty="0"/>
-          </a:p>
-          <a:p>
-            <a:pPr marL="342900" indent="-342900">
+            <a:endParaRPr lang="en-US" sz="4800" dirty="0"/>
+          </a:p>
+        </p:txBody>
+      </p:sp>
+      <p:sp>
+        <p:nvSpPr>
+          <p:cNvPr id="7" name="Text 4"/>
+          <p:cNvSpPr/>
+          <p:nvPr/>
+        </p:nvSpPr>
+        <p:spPr>
+          <a:xfrm>
+            <a:off x="666750" y="2867769"/>
+            <a:ext cx="7810500" cy="911275"/>
+          </a:xfrm>
+          <a:prstGeom prst="rect">
+            <a:avLst/>
+          </a:prstGeom>
+          <a:noFill/>
+          <a:ln/>
+        </p:spPr>
+        <p:txBody>
+          <a:bodyPr wrap="square" lIns="0" tIns="0" rIns="0" bIns="0" rtlCol="0" anchor="t"/>
+          <a:lstStyle/>
+          <a:p>
+            <a:pPr algn="ctr" indent="0" marL="0">
               <a:lnSpc>
-                <a:spcPts val="2610"/>
+                <a:spcPts val="2392"/>
               </a:lnSpc>
-              <a:buSzPct val="100000"/>
-              <a:buChar char="•"/>
+              <a:buNone/>
             </a:pPr>
             <a:r>
-              <a:rPr lang="en-US" sz="1800" dirty="0">
+              <a:rPr lang="en-US" sz="1650" dirty="0">
                 <a:solidFill>
-                  <a:srgbClr val="E5E7EB"/>
+                  <a:srgbClr val="9FB3C8"/>
                 </a:solidFill>
-                <a:latin typeface="Arial" pitchFamily="34" charset="0"/>
-                <a:ea typeface="Arial" pitchFamily="34" charset="-122"/>
-                <a:cs typeface="Arial" pitchFamily="34" charset="-120"/>
+                <a:latin typeface="Inter" pitchFamily="34" charset="0"/>
+                <a:ea typeface="Inter" pitchFamily="34" charset="-122"/>
+                <a:cs typeface="Inter" pitchFamily="34" charset="-120"/>
               </a:rPr>
-              <a:t>Enfoque de estudio resumido</a:t>
+              <a:t>Una visión clara y visual de cómo </a:t>
             </a:r>
-            <a:endParaRPr lang="en-US" sz="1800" dirty="0"/>
+            <a:pPr algn="ctr" indent="0" marL="0">
+              <a:lnSpc>
+                <a:spcPts val="2392"/>
+              </a:lnSpc>
+              <a:buNone/>
+            </a:pPr>
+            <a:r>
+              <a:rPr lang="en-US" sz="1650" b="1" dirty="0">
+                <a:solidFill>
+                  <a:srgbClr val="9FB3C8"/>
+                </a:solidFill>
+                <a:latin typeface="Inter" pitchFamily="34" charset="0"/>
+                <a:ea typeface="Inter" pitchFamily="34" charset="-122"/>
+                <a:cs typeface="Inter" pitchFamily="34" charset="-120"/>
+              </a:rPr>
+              <a:t>Spark MLlib</a:t>
+            </a:r>
+            <a:pPr algn="ctr" indent="0" marL="0">
+              <a:lnSpc>
+                <a:spcPts val="2392"/>
+              </a:lnSpc>
+              <a:buNone/>
+            </a:pPr>
+            <a:r>
+              <a:rPr lang="en-US" sz="1650" dirty="0">
+                <a:solidFill>
+                  <a:srgbClr val="9FB3C8"/>
+                </a:solidFill>
+                <a:latin typeface="Inter" pitchFamily="34" charset="0"/>
+                <a:ea typeface="Inter" pitchFamily="34" charset="-122"/>
+                <a:cs typeface="Inter" pitchFamily="34" charset="-120"/>
+              </a:rPr>
+              <a:t> permite entrenar, evaluar y desplegar modelos sobre grandes volúmenes de datos mediante procesamiento distribuido. [file:7]</a:t>
+            </a:r>
+            <a:endParaRPr lang="en-US" sz="1650" dirty="0"/>
+          </a:p>
+        </p:txBody>
+      </p:sp>
+      <p:sp>
+        <p:nvSpPr>
+          <p:cNvPr id="8" name="Text 5"/>
+          <p:cNvSpPr/>
+          <p:nvPr/>
+        </p:nvSpPr>
+        <p:spPr>
+          <a:xfrm>
+            <a:off x="8553450" y="4791075"/>
+            <a:ext cx="330327" cy="161925"/>
+          </a:xfrm>
+          <a:prstGeom prst="rect">
+            <a:avLst/>
+          </a:prstGeom>
+          <a:noFill/>
+          <a:ln/>
+        </p:spPr>
+        <p:txBody>
+          <a:bodyPr wrap="square" lIns="0" tIns="0" rIns="0" bIns="0" rtlCol="0" anchor="t"/>
+          <a:lstStyle/>
+          <a:p>
+            <a:pPr indent="0" marL="0">
+              <a:lnSpc>
+                <a:spcPts val="945"/>
+              </a:lnSpc>
+              <a:buNone/>
+            </a:pPr>
+            <a:r>
+              <a:rPr lang="en-US" sz="1050" dirty="0">
+                <a:solidFill>
+                  <a:srgbClr val="8EA4BC"/>
+                </a:solidFill>
+                <a:latin typeface="Inter" pitchFamily="34" charset="0"/>
+                <a:ea typeface="Inter" pitchFamily="34" charset="-122"/>
+                <a:cs typeface="Inter" pitchFamily="34" charset="-120"/>
+              </a:rPr>
+              <a:t>1 / 10</a:t>
+            </a:r>
+            <a:endParaRPr lang="en-US" sz="1050" dirty="0"/>
           </a:p>
         </p:txBody>
       </p:sp>

--- a/009_BIG_DATA_9/ml_escalable_infografia.pptx
+++ b/009_BIG_DATA_9/ml_escalable_infografia.pptx
@@ -15,9 +15,11 @@
     <p:sldId id="263" r:id="rId9"/>
     <p:sldId id="264" r:id="rId10"/>
     <p:sldId id="265" r:id="rId11"/>
+    <p:sldId id="266" r:id="rId12"/>
+    <p:sldId id="267" r:id="rId13"/>
   </p:sldIdLst>
   <p:notesMasterIdLst>
-    <p:notesMasterId r:id="rId12"/>
+    <p:notesMasterId r:id="rId14"/>
   </p:notesMasterIdLst>
   <p:sldSz cx="9144000" cy="5143500"/>
   <p:notesSz cx="5143500" cy="9144000"/>
@@ -623,6 +625,182 @@
             <a:fld id="{F7021451-1387-4CA6-816F-3879F97B5CBC}" type="slidenum">
               <a:rPr lang="en-US"/>
               <a:t>10</a:t>
+            </a:fld>
+            <a:endParaRPr lang="en-US"/>
+          </a:p>
+        </p:txBody>
+      </p:sp>
+    </p:spTree>
+    <p:extLst>
+      <p:ext uri="{BB962C8B-B14F-4D97-AF65-F5344CB8AC3E}">
+        <p14:creationId xmlns:p14="http://schemas.microsoft.com/office/powerpoint/2010/main" val="1024086991"/>
+      </p:ext>
+    </p:extLst>
+  </p:cSld>
+  <p:clrMapOvr>
+    <a:masterClrMapping/>
+  </p:clrMapOvr>
+</p:notes>
+</file>
+
+<file path=ppt/notesSlides/notesSlide11.xml><?xml version="1.0" encoding="utf-8"?>
+<p:notes xmlns:a="http://schemas.openxmlformats.org/drawingml/2006/main" xmlns:r="http://schemas.openxmlformats.org/officeDocument/2006/relationships" xmlns:p="http://schemas.openxmlformats.org/presentationml/2006/main">
+  <p:cSld>
+    <p:spTree>
+      <p:nvGrpSpPr>
+        <p:cNvPr id="1" name=""/>
+        <p:cNvGrpSpPr/>
+        <p:nvPr/>
+      </p:nvGrpSpPr>
+      <p:grpSpPr>
+        <a:xfrm>
+          <a:off x="0" y="0"/>
+          <a:ext cx="0" cy="0"/>
+          <a:chOff x="0" y="0"/>
+          <a:chExt cx="0" cy="0"/>
+        </a:xfrm>
+      </p:grpSpPr>
+      <p:sp>
+        <p:nvSpPr>
+          <p:cNvPr id="2" name="Slide Image Placeholder 1"/>
+          <p:cNvSpPr>
+            <a:spLocks noGrp="1" noRot="1" noChangeAspect="1"/>
+          </p:cNvSpPr>
+          <p:nvPr>
+            <p:ph type="sldImg"/>
+          </p:nvPr>
+        </p:nvSpPr>
+        <p:spPr/>
+      </p:sp>
+      <p:sp>
+        <p:nvSpPr>
+          <p:cNvPr id="3" name="Notes Placeholder 2"/>
+          <p:cNvSpPr>
+            <a:spLocks noGrp="1"/>
+          </p:cNvSpPr>
+          <p:nvPr>
+            <p:ph type="body" idx="1"/>
+          </p:nvPr>
+        </p:nvSpPr>
+        <p:spPr/>
+        <p:txBody>
+          <a:bodyPr/>
+          <a:lstStyle/>
+          <a:p>
+            <a:r>
+              <a:rPr lang="en-US" dirty="0"/>
+              <a:t/>
+            </a:r>
+            <a:endParaRPr lang="en-US" dirty="0"/>
+          </a:p>
+        </p:txBody>
+      </p:sp>
+      <p:sp>
+        <p:nvSpPr>
+          <p:cNvPr id="4" name="Slide Number Placeholder 3"/>
+          <p:cNvSpPr>
+            <a:spLocks noGrp="1"/>
+          </p:cNvSpPr>
+          <p:nvPr>
+            <p:ph type="sldNum" sz="quarter" idx="10"/>
+          </p:nvPr>
+        </p:nvSpPr>
+        <p:spPr/>
+        <p:txBody>
+          <a:bodyPr/>
+          <a:lstStyle/>
+          <a:p>
+            <a:fld id="{F7021451-1387-4CA6-816F-3879F97B5CBC}" type="slidenum">
+              <a:rPr lang="en-US"/>
+              <a:t>11</a:t>
+            </a:fld>
+            <a:endParaRPr lang="en-US"/>
+          </a:p>
+        </p:txBody>
+      </p:sp>
+    </p:spTree>
+    <p:extLst>
+      <p:ext uri="{BB962C8B-B14F-4D97-AF65-F5344CB8AC3E}">
+        <p14:creationId xmlns:p14="http://schemas.microsoft.com/office/powerpoint/2010/main" val="1024086991"/>
+      </p:ext>
+    </p:extLst>
+  </p:cSld>
+  <p:clrMapOvr>
+    <a:masterClrMapping/>
+  </p:clrMapOvr>
+</p:notes>
+</file>
+
+<file path=ppt/notesSlides/notesSlide12.xml><?xml version="1.0" encoding="utf-8"?>
+<p:notes xmlns:a="http://schemas.openxmlformats.org/drawingml/2006/main" xmlns:r="http://schemas.openxmlformats.org/officeDocument/2006/relationships" xmlns:p="http://schemas.openxmlformats.org/presentationml/2006/main">
+  <p:cSld>
+    <p:spTree>
+      <p:nvGrpSpPr>
+        <p:cNvPr id="1" name=""/>
+        <p:cNvGrpSpPr/>
+        <p:nvPr/>
+      </p:nvGrpSpPr>
+      <p:grpSpPr>
+        <a:xfrm>
+          <a:off x="0" y="0"/>
+          <a:ext cx="0" cy="0"/>
+          <a:chOff x="0" y="0"/>
+          <a:chExt cx="0" cy="0"/>
+        </a:xfrm>
+      </p:grpSpPr>
+      <p:sp>
+        <p:nvSpPr>
+          <p:cNvPr id="2" name="Slide Image Placeholder 1"/>
+          <p:cNvSpPr>
+            <a:spLocks noGrp="1" noRot="1" noChangeAspect="1"/>
+          </p:cNvSpPr>
+          <p:nvPr>
+            <p:ph type="sldImg"/>
+          </p:nvPr>
+        </p:nvSpPr>
+        <p:spPr/>
+      </p:sp>
+      <p:sp>
+        <p:nvSpPr>
+          <p:cNvPr id="3" name="Notes Placeholder 2"/>
+          <p:cNvSpPr>
+            <a:spLocks noGrp="1"/>
+          </p:cNvSpPr>
+          <p:nvPr>
+            <p:ph type="body" idx="1"/>
+          </p:nvPr>
+        </p:nvSpPr>
+        <p:spPr/>
+        <p:txBody>
+          <a:bodyPr/>
+          <a:lstStyle/>
+          <a:p>
+            <a:r>
+              <a:rPr lang="en-US" dirty="0"/>
+              <a:t/>
+            </a:r>
+            <a:endParaRPr lang="en-US" dirty="0"/>
+          </a:p>
+        </p:txBody>
+      </p:sp>
+      <p:sp>
+        <p:nvSpPr>
+          <p:cNvPr id="4" name="Slide Number Placeholder 3"/>
+          <p:cNvSpPr>
+            <a:spLocks noGrp="1"/>
+          </p:cNvSpPr>
+          <p:nvPr>
+            <p:ph type="sldNum" sz="quarter" idx="10"/>
+          </p:nvPr>
+        </p:nvSpPr>
+        <p:spPr/>
+        <p:txBody>
+          <a:bodyPr/>
+          <a:lstStyle/>
+          <a:p>
+            <a:fld id="{F7021451-1387-4CA6-816F-3879F97B5CBC}" type="slidenum">
+              <a:rPr lang="en-US"/>
+              <a:t>12</a:t>
             </a:fld>
             <a:endParaRPr lang="en-US"/>
           </a:p>
@@ -1701,63 +1879,339 @@
         </p:nvSpPr>
         <p:spPr>
           <a:xfrm>
-            <a:off x="3224213" y="4198144"/>
-            <a:ext cx="2695575" cy="390525"/>
+            <a:off x="552450" y="6446490"/>
+            <a:ext cx="4186684" cy="1066800"/>
           </a:xfrm>
           <a:prstGeom prst="roundRect">
             <a:avLst>
-              <a:gd name="adj" fmla="val 23391220"/>
+              <a:gd name="adj" fmla="val 120000"/>
             </a:avLst>
           </a:prstGeom>
           <a:solidFill>
-            <a:srgbClr val="38BDF8">
-              <a:alpha val="12000"/>
+            <a:srgbClr val="FFFFFF">
+              <a:alpha val="4000"/>
             </a:srgbClr>
           </a:solidFill>
-          <a:ln w="9525">
-            <a:solidFill>
-              <a:srgbClr val="38BDF8"/>
-            </a:solidFill>
-          </a:ln>
-        </p:spPr>
-        <p:txBody>
-          <a:bodyPr wrap="square" lIns="133350" tIns="133350" rIns="133350" bIns="133350" rtlCol="0" anchor="t">
+          <a:ln/>
+        </p:spPr>
+        <p:txBody>
+          <a:bodyPr wrap="square" lIns="152400" tIns="152400" rIns="152400" bIns="152400" rtlCol="0" anchor="t">
             <a:normAutofit/>
           </a:bodyPr>
           <a:lstStyle/>
           <a:p>
-            <a:pPr algn="ctr" indent="0" marL="0">
+            <a:pPr algn="l" indent="0" marL="0">
               <a:buNone/>
             </a:pPr>
             <a:r>
-              <a:rPr lang="en-US" sz="1125" b="1" dirty="0">
+              <a:rPr lang="en-US" sz="1350" dirty="0">
                 <a:solidFill>
-                  <a:srgbClr val="DFF7FF"/>
+                  <a:srgbClr val="9EB2C8"/>
                 </a:solidFill>
                 <a:latin typeface="Inter" pitchFamily="34" charset="0"/>
                 <a:ea typeface="Inter" pitchFamily="34" charset="-122"/>
                 <a:cs typeface="Inter" pitchFamily="34" charset="-120"/>
               </a:rPr>
-              <a:t>Estudio profesional · versión visual</a:t>
+              <a:t>Idea de apertura: “Cuando los datos dejan de caber en una sola máquina, ya no basta con saber machine learning; hay que saber hacerlo escalar”. [file:7]</a:t>
             </a:r>
-            <a:endParaRPr lang="en-US" sz="1125" dirty="0"/>
-          </a:p>
-        </p:txBody>
-      </p:sp>
-      <p:sp>
-        <p:nvSpPr>
-          <p:cNvPr id="4" name="Text 1"/>
+            <a:endParaRPr lang="en-US" sz="1350" dirty="0"/>
+          </a:p>
+        </p:txBody>
+      </p:sp>
+      <p:pic>
+        <p:nvPicPr>
+          <p:cNvPr id="4" name="Image 1" descr="preencoded.png">    </p:cNvPr>
+          <p:cNvPicPr>
+            <a:picLocks noChangeAspect="1"/>
+          </p:cNvPicPr>
+          <p:nvPr/>
+        </p:nvPicPr>
+        <p:blipFill>
+          <a:blip r:embed="rId2"/>
+          <a:stretch>
+            <a:fillRect/>
+          </a:stretch>
+        </p:blipFill>
+        <p:spPr>
+          <a:xfrm>
+            <a:off x="5024884" y="986284"/>
+            <a:ext cx="3566666" cy="5997773"/>
+          </a:xfrm>
+          <a:prstGeom prst="rect">
+            <a:avLst/>
+          </a:prstGeom>
+        </p:spPr>
+      </p:pic>
+      <p:sp>
+        <p:nvSpPr>
+          <p:cNvPr id="5" name="Text 1"/>
           <p:cNvSpPr/>
           <p:nvPr/>
         </p:nvSpPr>
         <p:spPr>
           <a:xfrm>
-            <a:off x="4271732" y="364480"/>
-            <a:ext cx="600388" cy="838200"/>
+            <a:off x="5301109" y="2462659"/>
+            <a:ext cx="1590675" cy="1870174"/>
+          </a:xfrm>
+          <a:prstGeom prst="roundRect">
+            <a:avLst>
+              <a:gd name="adj" fmla="val 103473"/>
+            </a:avLst>
+          </a:prstGeom>
+          <a:solidFill>
+            <a:srgbClr val="FFFFFF">
+              <a:alpha val="5000"/>
+            </a:srgbClr>
+          </a:solidFill>
+          <a:ln w="9525">
+            <a:solidFill>
+              <a:srgbClr val="FFFFFF"/>
+            </a:solidFill>
+          </a:ln>
+        </p:spPr>
+        <p:txBody>
+          <a:bodyPr wrap="none" lIns="0" tIns="0" rIns="0" bIns="0" rtlCol="0" anchor="ctr">
+            <a:normAutofit/>
+          </a:bodyPr>
+          <a:lstStyle/>
+          <a:p>
+            <a:pPr indent="0" marL="0">
+              <a:buNone/>
+            </a:pPr>
+            <a:endParaRPr lang="en-US" dirty="0"/>
+          </a:p>
+        </p:txBody>
+      </p:sp>
+      <p:pic>
+        <p:nvPicPr>
+          <p:cNvPr id="6" name="Image 2" descr="preencoded.png">    </p:cNvPr>
+          <p:cNvPicPr>
+            <a:picLocks noChangeAspect="1"/>
+          </p:cNvPicPr>
+          <p:nvPr/>
+        </p:nvPicPr>
+        <p:blipFill>
+          <a:blip r:embed="rId3"/>
+          <a:stretch>
+            <a:fillRect/>
+          </a:stretch>
+        </p:blipFill>
+        <p:spPr>
+          <a:xfrm>
+            <a:off x="5482084" y="2643634"/>
+            <a:ext cx="1228725" cy="371475"/>
           </a:xfrm>
           <a:prstGeom prst="rect">
             <a:avLst/>
           </a:prstGeom>
+        </p:spPr>
+      </p:pic>
+      <p:sp>
+        <p:nvSpPr>
+          <p:cNvPr id="7" name="Text 2"/>
+          <p:cNvSpPr/>
+          <p:nvPr/>
+        </p:nvSpPr>
+        <p:spPr>
+          <a:xfrm>
+            <a:off x="7025134" y="2462659"/>
+            <a:ext cx="1290191" cy="1870174"/>
+          </a:xfrm>
+          <a:prstGeom prst="roundRect">
+            <a:avLst>
+              <a:gd name="adj" fmla="val 127572"/>
+            </a:avLst>
+          </a:prstGeom>
+          <a:solidFill>
+            <a:srgbClr val="FFFFFF">
+              <a:alpha val="5000"/>
+            </a:srgbClr>
+          </a:solidFill>
+          <a:ln w="9525">
+            <a:solidFill>
+              <a:srgbClr val="FFFFFF"/>
+            </a:solidFill>
+          </a:ln>
+        </p:spPr>
+        <p:txBody>
+          <a:bodyPr wrap="none" lIns="0" tIns="0" rIns="0" bIns="0" rtlCol="0" anchor="ctr">
+            <a:normAutofit/>
+          </a:bodyPr>
+          <a:lstStyle/>
+          <a:p>
+            <a:pPr indent="0" marL="0">
+              <a:buNone/>
+            </a:pPr>
+            <a:endParaRPr lang="en-US" dirty="0"/>
+          </a:p>
+        </p:txBody>
+      </p:sp>
+      <p:pic>
+        <p:nvPicPr>
+          <p:cNvPr id="8" name="Image 3" descr="preencoded.png">    </p:cNvPr>
+          <p:cNvPicPr>
+            <a:picLocks noChangeAspect="1"/>
+          </p:cNvPicPr>
+          <p:nvPr/>
+        </p:nvPicPr>
+        <p:blipFill>
+          <a:blip r:embed="rId4"/>
+          <a:stretch>
+            <a:fillRect/>
+          </a:stretch>
+        </p:blipFill>
+        <p:spPr>
+          <a:xfrm>
+            <a:off x="7206109" y="2643634"/>
+            <a:ext cx="928241" cy="371475"/>
+          </a:xfrm>
+          <a:prstGeom prst="rect">
+            <a:avLst/>
+          </a:prstGeom>
+        </p:spPr>
+      </p:pic>
+      <p:sp>
+        <p:nvSpPr>
+          <p:cNvPr id="9" name="Text 3"/>
+          <p:cNvSpPr/>
+          <p:nvPr/>
+        </p:nvSpPr>
+        <p:spPr>
+          <a:xfrm>
+            <a:off x="5301109" y="4466183"/>
+            <a:ext cx="1590675" cy="2241649"/>
+          </a:xfrm>
+          <a:prstGeom prst="roundRect">
+            <a:avLst>
+              <a:gd name="adj" fmla="val 103473"/>
+            </a:avLst>
+          </a:prstGeom>
+          <a:solidFill>
+            <a:srgbClr val="FFFFFF">
+              <a:alpha val="5000"/>
+            </a:srgbClr>
+          </a:solidFill>
+          <a:ln w="9525">
+            <a:solidFill>
+              <a:srgbClr val="FFFFFF"/>
+            </a:solidFill>
+          </a:ln>
+        </p:spPr>
+        <p:txBody>
+          <a:bodyPr wrap="none" lIns="0" tIns="0" rIns="0" bIns="0" rtlCol="0" anchor="ctr">
+            <a:normAutofit/>
+          </a:bodyPr>
+          <a:lstStyle/>
+          <a:p>
+            <a:pPr indent="0" marL="0">
+              <a:buNone/>
+            </a:pPr>
+            <a:endParaRPr lang="en-US" dirty="0"/>
+          </a:p>
+        </p:txBody>
+      </p:sp>
+      <p:pic>
+        <p:nvPicPr>
+          <p:cNvPr id="10" name="Image 4" descr="preencoded.png">    </p:cNvPr>
+          <p:cNvPicPr>
+            <a:picLocks noChangeAspect="1"/>
+          </p:cNvPicPr>
+          <p:nvPr/>
+        </p:nvPicPr>
+        <p:blipFill>
+          <a:blip r:embed="rId5"/>
+          <a:stretch>
+            <a:fillRect/>
+          </a:stretch>
+        </p:blipFill>
+        <p:spPr>
+          <a:xfrm>
+            <a:off x="5482084" y="4647158"/>
+            <a:ext cx="1228725" cy="371475"/>
+          </a:xfrm>
+          <a:prstGeom prst="rect">
+            <a:avLst/>
+          </a:prstGeom>
+        </p:spPr>
+      </p:pic>
+      <p:sp>
+        <p:nvSpPr>
+          <p:cNvPr id="11" name="Text 4"/>
+          <p:cNvSpPr/>
+          <p:nvPr/>
+        </p:nvSpPr>
+        <p:spPr>
+          <a:xfrm>
+            <a:off x="7025134" y="4466183"/>
+            <a:ext cx="1290191" cy="2241649"/>
+          </a:xfrm>
+          <a:prstGeom prst="roundRect">
+            <a:avLst>
+              <a:gd name="adj" fmla="val 127572"/>
+            </a:avLst>
+          </a:prstGeom>
+          <a:solidFill>
+            <a:srgbClr val="FFFFFF">
+              <a:alpha val="5000"/>
+            </a:srgbClr>
+          </a:solidFill>
+          <a:ln w="9525">
+            <a:solidFill>
+              <a:srgbClr val="FFFFFF"/>
+            </a:solidFill>
+          </a:ln>
+        </p:spPr>
+        <p:txBody>
+          <a:bodyPr wrap="none" lIns="0" tIns="0" rIns="0" bIns="0" rtlCol="0" anchor="ctr">
+            <a:normAutofit/>
+          </a:bodyPr>
+          <a:lstStyle/>
+          <a:p>
+            <a:pPr indent="0" marL="0">
+              <a:buNone/>
+            </a:pPr>
+            <a:endParaRPr lang="en-US" dirty="0"/>
+          </a:p>
+        </p:txBody>
+      </p:sp>
+      <p:pic>
+        <p:nvPicPr>
+          <p:cNvPr id="12" name="Image 5" descr="preencoded.png">    </p:cNvPr>
+          <p:cNvPicPr>
+            <a:picLocks noChangeAspect="1"/>
+          </p:cNvPicPr>
+          <p:nvPr/>
+        </p:nvPicPr>
+        <p:blipFill>
+          <a:blip r:embed="rId6"/>
+          <a:stretch>
+            <a:fillRect/>
+          </a:stretch>
+        </p:blipFill>
+        <p:spPr>
+          <a:xfrm>
+            <a:off x="7206109" y="4647158"/>
+            <a:ext cx="928241" cy="742950"/>
+          </a:xfrm>
+          <a:prstGeom prst="rect">
+            <a:avLst/>
+          </a:prstGeom>
+        </p:spPr>
+      </p:pic>
+      <p:sp>
+        <p:nvSpPr>
+          <p:cNvPr id="13" name="Text 5"/>
+          <p:cNvSpPr/>
+          <p:nvPr/>
+        </p:nvSpPr>
+        <p:spPr>
+          <a:xfrm>
+            <a:off x="552450" y="457200"/>
+            <a:ext cx="4270418" cy="161925"/>
+          </a:xfrm>
+          <a:prstGeom prst="rect">
+            <a:avLst/>
+          </a:prstGeom>
           <a:noFill/>
           <a:ln/>
         </p:spPr>
@@ -1765,49 +2219,7 @@
           <a:bodyPr wrap="square" lIns="0" tIns="0" rIns="0" bIns="0" rtlCol="0" anchor="t"/>
           <a:lstStyle/>
           <a:p>
-            <a:pPr algn="ctr" indent="0" marL="0">
-              <a:lnSpc>
-                <a:spcPts val="6600"/>
-              </a:lnSpc>
-              <a:buNone/>
-            </a:pPr>
-            <a:r>
-              <a:rPr lang="en-US" sz="6600" dirty="0">
-                <a:solidFill>
-                  <a:srgbClr val="EAF2FF"/>
-                </a:solidFill>
-                <a:latin typeface="Inter" pitchFamily="34" charset="0"/>
-                <a:ea typeface="Inter" pitchFamily="34" charset="-122"/>
-                <a:cs typeface="Inter" pitchFamily="34" charset="-120"/>
-              </a:rPr>
-              <a:t>⚡</a:t>
-            </a:r>
-            <a:endParaRPr lang="en-US" sz="6600" dirty="0"/>
-          </a:p>
-        </p:txBody>
-      </p:sp>
-      <p:sp>
-        <p:nvSpPr>
-          <p:cNvPr id="5" name="Text 2"/>
-          <p:cNvSpPr/>
-          <p:nvPr/>
-        </p:nvSpPr>
-        <p:spPr>
-          <a:xfrm>
-            <a:off x="3065490" y="1202680"/>
-            <a:ext cx="3013019" cy="161925"/>
-          </a:xfrm>
-          <a:prstGeom prst="rect">
-            <a:avLst/>
-          </a:prstGeom>
-          <a:noFill/>
-          <a:ln/>
-        </p:spPr>
-        <p:txBody>
-          <a:bodyPr wrap="square" lIns="0" tIns="0" rIns="0" bIns="0" rtlCol="0" anchor="t"/>
-          <a:lstStyle/>
-          <a:p>
-            <a:pPr algn="ctr" indent="0" marL="0">
+            <a:pPr indent="0" marL="0">
               <a:lnSpc>
                 <a:spcPts val="945"/>
               </a:lnSpc>
@@ -1822,7 +2234,7 @@
                 <a:ea typeface="Inter" pitchFamily="34" charset="-122"/>
                 <a:cs typeface="Inter" pitchFamily="34" charset="-120"/>
               </a:rPr>
-              <a:t>Apache Spark · MLlib · Big Data</a:t>
+              <a:t>Versión premium · exposición en clase</a:t>
             </a:r>
             <a:endParaRPr lang="en-US" sz="1050" dirty="0"/>
           </a:p>
@@ -1830,14 +2242,14 @@
       </p:sp>
       <p:sp>
         <p:nvSpPr>
-          <p:cNvPr id="6" name="Text 3"/>
+          <p:cNvPr id="14" name="Text 6"/>
           <p:cNvSpPr/>
           <p:nvPr/>
         </p:nvSpPr>
         <p:spPr>
           <a:xfrm>
-            <a:off x="609600" y="1478905"/>
-            <a:ext cx="7924800" cy="1255514"/>
+            <a:off x="552450" y="733425"/>
+            <a:ext cx="4186684" cy="3303240"/>
           </a:xfrm>
           <a:prstGeom prst="rect">
             <a:avLst/>
@@ -1849,37 +2261,37 @@
           <a:bodyPr wrap="square" lIns="0" tIns="0" rIns="0" bIns="0" rtlCol="0" anchor="t"/>
           <a:lstStyle/>
           <a:p>
-            <a:pPr algn="ctr" indent="0" marL="0">
+            <a:pPr indent="0" marL="0">
               <a:lnSpc>
-                <a:spcPts val="4944"/>
+                <a:spcPts val="5202"/>
               </a:lnSpc>
               <a:buNone/>
             </a:pPr>
             <a:r>
-              <a:rPr lang="en-US" sz="4800" b="1" dirty="0">
+              <a:rPr lang="en-US" sz="5100" b="1" dirty="0">
                 <a:solidFill>
-                  <a:srgbClr val="EAF2FF"/>
+                  <a:srgbClr val="ECF5FF"/>
                 </a:solidFill>
                 <a:latin typeface="Space Grotesk" pitchFamily="34" charset="0"/>
                 <a:ea typeface="Space Grotesk" pitchFamily="34" charset="-122"/>
                 <a:cs typeface="Space Grotesk" pitchFamily="34" charset="-120"/>
               </a:rPr>
-              <a:t>Machine Learning Escalable</a:t>
+              <a:t>Machine Learning Escalable con Spark MLlib</a:t>
             </a:r>
-            <a:endParaRPr lang="en-US" sz="4800" dirty="0"/>
-          </a:p>
-        </p:txBody>
-      </p:sp>
-      <p:sp>
-        <p:nvSpPr>
-          <p:cNvPr id="7" name="Text 4"/>
+            <a:endParaRPr lang="en-US" sz="5100" dirty="0"/>
+          </a:p>
+        </p:txBody>
+      </p:sp>
+      <p:sp>
+        <p:nvSpPr>
+          <p:cNvPr id="15" name="Text 7"/>
           <p:cNvSpPr/>
           <p:nvPr/>
         </p:nvSpPr>
         <p:spPr>
           <a:xfrm>
-            <a:off x="666750" y="2867769"/>
-            <a:ext cx="7810500" cy="911275"/>
+            <a:off x="552450" y="4255740"/>
+            <a:ext cx="4186684" cy="1971675"/>
           </a:xfrm>
           <a:prstGeom prst="rect">
             <a:avLst/>
@@ -1891,70 +2303,280 @@
           <a:bodyPr wrap="square" lIns="0" tIns="0" rIns="0" bIns="0" rtlCol="0" anchor="t"/>
           <a:lstStyle/>
           <a:p>
-            <a:pPr algn="ctr" indent="0" marL="0">
+            <a:pPr indent="0" marL="0">
               <a:lnSpc>
-                <a:spcPts val="2392"/>
+                <a:spcPts val="2588"/>
               </a:lnSpc>
               <a:buNone/>
             </a:pPr>
             <a:r>
-              <a:rPr lang="en-US" sz="1650" dirty="0">
+              <a:rPr lang="en-US" sz="1725" dirty="0">
                 <a:solidFill>
-                  <a:srgbClr val="9FB3C8"/>
+                  <a:srgbClr val="9EB2C8"/>
                 </a:solidFill>
                 <a:latin typeface="Inter" pitchFamily="34" charset="0"/>
                 <a:ea typeface="Inter" pitchFamily="34" charset="-122"/>
                 <a:cs typeface="Inter" pitchFamily="34" charset="-120"/>
               </a:rPr>
-              <a:t>Una visión clara y visual de cómo </a:t>
+              <a:t>Presentación optimizada para </a:t>
             </a:r>
-            <a:pPr algn="ctr" indent="0" marL="0">
+            <a:pPr indent="0" marL="0">
               <a:lnSpc>
-                <a:spcPts val="2392"/>
+                <a:spcPts val="2588"/>
               </a:lnSpc>
               <a:buNone/>
             </a:pPr>
             <a:r>
-              <a:rPr lang="en-US" sz="1650" b="1" dirty="0">
+              <a:rPr lang="en-US" sz="1725" b="1" dirty="0">
                 <a:solidFill>
-                  <a:srgbClr val="9FB3C8"/>
+                  <a:srgbClr val="9EB2C8"/>
                 </a:solidFill>
                 <a:latin typeface="Inter" pitchFamily="34" charset="0"/>
                 <a:ea typeface="Inter" pitchFamily="34" charset="-122"/>
                 <a:cs typeface="Inter" pitchFamily="34" charset="-120"/>
               </a:rPr>
-              <a:t>Spark MLlib</a:t>
+              <a:t>explicar</a:t>
             </a:r>
-            <a:pPr algn="ctr" indent="0" marL="0">
+            <a:pPr indent="0" marL="0">
               <a:lnSpc>
-                <a:spcPts val="2392"/>
+                <a:spcPts val="2588"/>
               </a:lnSpc>
               <a:buNone/>
             </a:pPr>
             <a:r>
-              <a:rPr lang="en-US" sz="1650" dirty="0">
+              <a:rPr lang="en-US" sz="1725" dirty="0">
                 <a:solidFill>
-                  <a:srgbClr val="9FB3C8"/>
+                  <a:srgbClr val="9EB2C8"/>
                 </a:solidFill>
                 <a:latin typeface="Inter" pitchFamily="34" charset="0"/>
                 <a:ea typeface="Inter" pitchFamily="34" charset="-122"/>
                 <a:cs typeface="Inter" pitchFamily="34" charset="-120"/>
               </a:rPr>
-              <a:t> permite entrenar, evaluar y desplegar modelos sobre grandes volúmenes de datos mediante procesamiento distribuido. [file:7]</a:t>
+              <a:t>, no solo para estudiar: mejor portada, más ritmo visual, comparaciones claras y diagramas que muestran el flujo de trabajo completo sobre datos masivos. [file:7]</a:t>
             </a:r>
-            <a:endParaRPr lang="en-US" sz="1650" dirty="0"/>
-          </a:p>
-        </p:txBody>
-      </p:sp>
-      <p:sp>
-        <p:nvSpPr>
-          <p:cNvPr id="8" name="Text 5"/>
+            <a:endParaRPr lang="en-US" sz="1725" dirty="0"/>
+          </a:p>
+        </p:txBody>
+      </p:sp>
+      <p:sp>
+        <p:nvSpPr>
+          <p:cNvPr id="16" name="Text 8"/>
           <p:cNvSpPr/>
           <p:nvPr/>
         </p:nvSpPr>
         <p:spPr>
           <a:xfrm>
-            <a:off x="8553450" y="4791075"/>
+            <a:off x="5301109" y="1262509"/>
+            <a:ext cx="3074500" cy="1028700"/>
+          </a:xfrm>
+          <a:prstGeom prst="rect">
+            <a:avLst/>
+          </a:prstGeom>
+          <a:noFill/>
+          <a:ln/>
+        </p:spPr>
+        <p:txBody>
+          <a:bodyPr wrap="square" lIns="0" tIns="0" rIns="0" bIns="0" rtlCol="0" anchor="t"/>
+          <a:lstStyle/>
+          <a:p>
+            <a:pPr indent="0" marL="0">
+              <a:lnSpc>
+                <a:spcPts val="8100"/>
+              </a:lnSpc>
+              <a:buNone/>
+            </a:pPr>
+            <a:r>
+              <a:rPr lang="en-US" sz="8100" dirty="0">
+                <a:solidFill>
+                  <a:srgbClr val="ECF5FF"/>
+                </a:solidFill>
+                <a:latin typeface="Inter" pitchFamily="34" charset="0"/>
+                <a:ea typeface="Inter" pitchFamily="34" charset="-122"/>
+                <a:cs typeface="Inter" pitchFamily="34" charset="-120"/>
+              </a:rPr>
+              <a:t>⚡</a:t>
+            </a:r>
+            <a:endParaRPr lang="en-US" sz="8100" dirty="0"/>
+          </a:p>
+        </p:txBody>
+      </p:sp>
+      <p:sp>
+        <p:nvSpPr>
+          <p:cNvPr id="17" name="Text 9"/>
+          <p:cNvSpPr/>
+          <p:nvPr/>
+        </p:nvSpPr>
+        <p:spPr>
+          <a:xfrm>
+            <a:off x="5482084" y="3072259"/>
+            <a:ext cx="1228725" cy="1079599"/>
+          </a:xfrm>
+          <a:prstGeom prst="rect">
+            <a:avLst/>
+          </a:prstGeom>
+          <a:noFill/>
+          <a:ln/>
+        </p:spPr>
+        <p:txBody>
+          <a:bodyPr wrap="square" lIns="0" tIns="0" rIns="0" bIns="0" rtlCol="0" anchor="t"/>
+          <a:lstStyle/>
+          <a:p>
+            <a:pPr indent="0" marL="0">
+              <a:lnSpc>
+                <a:spcPts val="1418"/>
+              </a:lnSpc>
+              <a:buNone/>
+            </a:pPr>
+            <a:r>
+              <a:rPr lang="en-US" sz="1050" dirty="0">
+                <a:solidFill>
+                  <a:srgbClr val="9EB2C8"/>
+                </a:solidFill>
+                <a:latin typeface="Inter" pitchFamily="34" charset="0"/>
+                <a:ea typeface="Inter" pitchFamily="34" charset="-122"/>
+                <a:cs typeface="Inter" pitchFamily="34" charset="-120"/>
+              </a:rPr>
+              <a:t>Biblioteca de machine learning distribuido integrada en Apache Spark. [file:7]</a:t>
+            </a:r>
+            <a:endParaRPr lang="en-US" sz="1050" dirty="0"/>
+          </a:p>
+        </p:txBody>
+      </p:sp>
+      <p:sp>
+        <p:nvSpPr>
+          <p:cNvPr id="18" name="Text 10"/>
+          <p:cNvSpPr/>
+          <p:nvPr/>
+        </p:nvSpPr>
+        <p:spPr>
+          <a:xfrm>
+            <a:off x="7206109" y="3072259"/>
+            <a:ext cx="928241" cy="1079599"/>
+          </a:xfrm>
+          <a:prstGeom prst="rect">
+            <a:avLst/>
+          </a:prstGeom>
+          <a:noFill/>
+          <a:ln/>
+        </p:spPr>
+        <p:txBody>
+          <a:bodyPr wrap="square" lIns="0" tIns="0" rIns="0" bIns="0" rtlCol="0" anchor="t"/>
+          <a:lstStyle/>
+          <a:p>
+            <a:pPr indent="0" marL="0">
+              <a:lnSpc>
+                <a:spcPts val="1418"/>
+              </a:lnSpc>
+              <a:buNone/>
+            </a:pPr>
+            <a:r>
+              <a:rPr lang="en-US" sz="1050" dirty="0">
+                <a:solidFill>
+                  <a:srgbClr val="9EB2C8"/>
+                </a:solidFill>
+                <a:latin typeface="Inter" pitchFamily="34" charset="0"/>
+                <a:ea typeface="Inter" pitchFamily="34" charset="-122"/>
+                <a:cs typeface="Inter" pitchFamily="34" charset="-120"/>
+              </a:rPr>
+              <a:t>Procesamiento paralelo para trabajar con grandes volúmenes de datos. [file:7]</a:t>
+            </a:r>
+            <a:endParaRPr lang="en-US" sz="1050" dirty="0"/>
+          </a:p>
+        </p:txBody>
+      </p:sp>
+      <p:sp>
+        <p:nvSpPr>
+          <p:cNvPr id="19" name="Text 11"/>
+          <p:cNvSpPr/>
+          <p:nvPr/>
+        </p:nvSpPr>
+        <p:spPr>
+          <a:xfrm>
+            <a:off x="5482084" y="5075783"/>
+            <a:ext cx="1228725" cy="899666"/>
+          </a:xfrm>
+          <a:prstGeom prst="rect">
+            <a:avLst/>
+          </a:prstGeom>
+          <a:noFill/>
+          <a:ln/>
+        </p:spPr>
+        <p:txBody>
+          <a:bodyPr wrap="square" lIns="0" tIns="0" rIns="0" bIns="0" rtlCol="0" anchor="t"/>
+          <a:lstStyle/>
+          <a:p>
+            <a:pPr indent="0" marL="0">
+              <a:lnSpc>
+                <a:spcPts val="1418"/>
+              </a:lnSpc>
+              <a:buNone/>
+            </a:pPr>
+            <a:r>
+              <a:rPr lang="en-US" sz="1050" dirty="0">
+                <a:solidFill>
+                  <a:srgbClr val="9EB2C8"/>
+                </a:solidFill>
+                <a:latin typeface="Inter" pitchFamily="34" charset="0"/>
+                <a:ea typeface="Inter" pitchFamily="34" charset="-122"/>
+                <a:cs typeface="Inter" pitchFamily="34" charset="-120"/>
+              </a:rPr>
+              <a:t>Permiten automatizar preparación, entrenamiento y evaluación. [file:7]</a:t>
+            </a:r>
+            <a:endParaRPr lang="en-US" sz="1050" dirty="0"/>
+          </a:p>
+        </p:txBody>
+      </p:sp>
+      <p:sp>
+        <p:nvSpPr>
+          <p:cNvPr id="20" name="Text 12"/>
+          <p:cNvSpPr/>
+          <p:nvPr/>
+        </p:nvSpPr>
+        <p:spPr>
+          <a:xfrm>
+            <a:off x="7206109" y="5447258"/>
+            <a:ext cx="928241" cy="1079599"/>
+          </a:xfrm>
+          <a:prstGeom prst="rect">
+            <a:avLst/>
+          </a:prstGeom>
+          <a:noFill/>
+          <a:ln/>
+        </p:spPr>
+        <p:txBody>
+          <a:bodyPr wrap="square" lIns="0" tIns="0" rIns="0" bIns="0" rtlCol="0" anchor="t"/>
+          <a:lstStyle/>
+          <a:p>
+            <a:pPr indent="0" marL="0">
+              <a:lnSpc>
+                <a:spcPts val="1418"/>
+              </a:lnSpc>
+              <a:buNone/>
+            </a:pPr>
+            <a:r>
+              <a:rPr lang="en-US" sz="1050" dirty="0">
+                <a:solidFill>
+                  <a:srgbClr val="9EB2C8"/>
+                </a:solidFill>
+                <a:latin typeface="Inter" pitchFamily="34" charset="0"/>
+                <a:ea typeface="Inter" pitchFamily="34" charset="-122"/>
+                <a:cs typeface="Inter" pitchFamily="34" charset="-120"/>
+              </a:rPr>
+              <a:t>Contexto donde MLlib muestra su valor práctico principal. [file:7]</a:t>
+            </a:r>
+            <a:endParaRPr lang="en-US" sz="1050" dirty="0"/>
+          </a:p>
+        </p:txBody>
+      </p:sp>
+      <p:sp>
+        <p:nvSpPr>
+          <p:cNvPr id="21" name="Text 13"/>
+          <p:cNvSpPr/>
+          <p:nvPr/>
+        </p:nvSpPr>
+        <p:spPr>
+          <a:xfrm>
+            <a:off x="8572500" y="4791075"/>
             <a:ext cx="330327" cy="161925"/>
           </a:xfrm>
           <a:prstGeom prst="rect">
@@ -1976,13 +2598,13 @@
             <a:r>
               <a:rPr lang="en-US" sz="1050" dirty="0">
                 <a:solidFill>
-                  <a:srgbClr val="8EA4BC"/>
+                  <a:srgbClr val="8DA4BD"/>
                 </a:solidFill>
                 <a:latin typeface="Inter" pitchFamily="34" charset="0"/>
                 <a:ea typeface="Inter" pitchFamily="34" charset="-122"/>
                 <a:cs typeface="Inter" pitchFamily="34" charset="-120"/>
               </a:rPr>
-              <a:t>1 / 10</a:t>
+              <a:t>1 / 12</a:t>
             </a:r>
             <a:endParaRPr lang="en-US" sz="1050" dirty="0"/>
           </a:p>
@@ -1999,6 +2621,104 @@
 <file path=ppt/slides/slide10.xml><?xml version="1.0" encoding="utf-8"?>
 <p:sld xmlns:a="http://schemas.openxmlformats.org/drawingml/2006/main" xmlns:r="http://schemas.openxmlformats.org/officeDocument/2006/relationships" xmlns:p="http://schemas.openxmlformats.org/presentationml/2006/main">
   <p:cSld name="Slide 10">
+    <p:spTree>
+      <p:nvGrpSpPr>
+        <p:cNvPr id="1" name=""/>
+        <p:cNvGrpSpPr/>
+        <p:nvPr/>
+      </p:nvGrpSpPr>
+      <p:grpSpPr>
+        <a:xfrm>
+          <a:off x="0" y="0"/>
+          <a:ext cx="0" cy="0"/>
+          <a:chOff x="0" y="0"/>
+          <a:chExt cx="0" cy="0"/>
+        </a:xfrm>
+      </p:grpSpPr>
+      <p:pic>
+        <p:nvPicPr>
+          <p:cNvPr id="2" name="Image 0" descr="preencoded.png">    </p:cNvPr>
+          <p:cNvPicPr>
+            <a:picLocks noChangeAspect="1"/>
+          </p:cNvPicPr>
+          <p:nvPr/>
+        </p:nvPicPr>
+        <p:blipFill>
+          <a:blip r:embed="rId1"/>
+          <a:stretch>
+            <a:fillRect/>
+          </a:stretch>
+        </p:blipFill>
+        <p:spPr>
+          <a:xfrm>
+            <a:off x="0" y="0"/>
+            <a:ext cx="9144000" cy="5143500"/>
+          </a:xfrm>
+          <a:prstGeom prst="rect">
+            <a:avLst/>
+          </a:prstGeom>
+        </p:spPr>
+      </p:pic>
+    </p:spTree>
+  </p:cSld>
+  <p:clrMapOvr>
+    <a:masterClrMapping/>
+  </p:clrMapOvr>
+</p:sld>
+</file>
+
+<file path=ppt/slides/slide11.xml><?xml version="1.0" encoding="utf-8"?>
+<p:sld xmlns:a="http://schemas.openxmlformats.org/drawingml/2006/main" xmlns:r="http://schemas.openxmlformats.org/officeDocument/2006/relationships" xmlns:p="http://schemas.openxmlformats.org/presentationml/2006/main">
+  <p:cSld name="Slide 11">
+    <p:spTree>
+      <p:nvGrpSpPr>
+        <p:cNvPr id="1" name=""/>
+        <p:cNvGrpSpPr/>
+        <p:nvPr/>
+      </p:nvGrpSpPr>
+      <p:grpSpPr>
+        <a:xfrm>
+          <a:off x="0" y="0"/>
+          <a:ext cx="0" cy="0"/>
+          <a:chOff x="0" y="0"/>
+          <a:chExt cx="0" cy="0"/>
+        </a:xfrm>
+      </p:grpSpPr>
+      <p:pic>
+        <p:nvPicPr>
+          <p:cNvPr id="2" name="Image 0" descr="preencoded.png">    </p:cNvPr>
+          <p:cNvPicPr>
+            <a:picLocks noChangeAspect="1"/>
+          </p:cNvPicPr>
+          <p:nvPr/>
+        </p:nvPicPr>
+        <p:blipFill>
+          <a:blip r:embed="rId1"/>
+          <a:stretch>
+            <a:fillRect/>
+          </a:stretch>
+        </p:blipFill>
+        <p:spPr>
+          <a:xfrm>
+            <a:off x="0" y="0"/>
+            <a:ext cx="9144000" cy="5143500"/>
+          </a:xfrm>
+          <a:prstGeom prst="rect">
+            <a:avLst/>
+          </a:prstGeom>
+        </p:spPr>
+      </p:pic>
+    </p:spTree>
+  </p:cSld>
+  <p:clrMapOvr>
+    <a:masterClrMapping/>
+  </p:clrMapOvr>
+</p:sld>
+</file>
+
+<file path=ppt/slides/slide12.xml><?xml version="1.0" encoding="utf-8"?>
+<p:sld xmlns:a="http://schemas.openxmlformats.org/drawingml/2006/main" xmlns:r="http://schemas.openxmlformats.org/officeDocument/2006/relationships" xmlns:p="http://schemas.openxmlformats.org/presentationml/2006/main">
+  <p:cSld name="Slide 12">
     <p:spTree>
       <p:nvGrpSpPr>
         <p:cNvPr id="1" name=""/>
